--- a/Documentation/3.Tokens.pptx
+++ b/Documentation/3.Tokens.pptx
@@ -9911,7 +9911,7 @@
           <a:p>
             <a:r>
               <a:rPr lang="en-US"/>
-              <a:t>Constraints</a:t>
+              <a:t>Constants</a:t>
             </a:r>
             <a:endParaRPr lang="en-US"/>
           </a:p>
